--- a/resources/presentations/Lunch-Is-Packed-Module-05-develop-and-communicate-ideas.pptx
+++ b/resources/presentations/Lunch-Is-Packed-Module-05-develop-and-communicate-ideas.pptx
@@ -2,20 +2,20 @@
 <file path=ppt/presentation.xml><?xml version="1.0" encoding="utf-8"?>
 <p:presentation xmlns:p="http://schemas.openxmlformats.org/presentationml/2006/main">
   <p:sldMasterIdLst>
-    <p:sldMasterId xmlns:r="http://schemas.openxmlformats.org/officeDocument/2006/relationships" id="2147483648" r:id="R6451b4bae7784c6a"/>
+    <p:sldMasterId xmlns:r="http://schemas.openxmlformats.org/officeDocument/2006/relationships" id="2147483648" r:id="Redc7b816f1ea4c51"/>
   </p:sldMasterIdLst>
   <p:notesMasterIdLst>
-    <p:notesMasterId xmlns:r="http://schemas.openxmlformats.org/officeDocument/2006/relationships" r:id="Rb0fc725deacf44c1"/>
+    <p:notesMasterId xmlns:r="http://schemas.openxmlformats.org/officeDocument/2006/relationships" r:id="Rf20098a4b5f749da"/>
   </p:notesMasterIdLst>
   <p:sldIdLst>
-    <p:sldId xmlns:r="http://schemas.openxmlformats.org/officeDocument/2006/relationships" id="256" r:id="R836af1a375c84f75"/>
-    <p:sldId xmlns:r="http://schemas.openxmlformats.org/officeDocument/2006/relationships" id="257" r:id="Rdd4f0851f3c54b50"/>
-    <p:sldId xmlns:r="http://schemas.openxmlformats.org/officeDocument/2006/relationships" id="258" r:id="Rf079d77d2e3846a7"/>
-    <p:sldId xmlns:r="http://schemas.openxmlformats.org/officeDocument/2006/relationships" id="259" r:id="Rdacceee3a3dc49fe"/>
-    <p:sldId xmlns:r="http://schemas.openxmlformats.org/officeDocument/2006/relationships" id="260" r:id="R3547910200fc4194"/>
-    <p:sldId xmlns:r="http://schemas.openxmlformats.org/officeDocument/2006/relationships" id="261" r:id="Rba2cf94aa05f436f"/>
-    <p:sldId xmlns:r="http://schemas.openxmlformats.org/officeDocument/2006/relationships" id="262" r:id="Ra5d2d28385d44196"/>
-    <p:sldId xmlns:r="http://schemas.openxmlformats.org/officeDocument/2006/relationships" id="263" r:id="Re897237e869b4de2"/>
+    <p:sldId xmlns:r="http://schemas.openxmlformats.org/officeDocument/2006/relationships" id="256" r:id="R0e47739c36194bcf"/>
+    <p:sldId xmlns:r="http://schemas.openxmlformats.org/officeDocument/2006/relationships" id="257" r:id="R929874ae814a427b"/>
+    <p:sldId xmlns:r="http://schemas.openxmlformats.org/officeDocument/2006/relationships" id="258" r:id="R3008e2dba3884974"/>
+    <p:sldId xmlns:r="http://schemas.openxmlformats.org/officeDocument/2006/relationships" id="259" r:id="R67f1929cca4c496f"/>
+    <p:sldId xmlns:r="http://schemas.openxmlformats.org/officeDocument/2006/relationships" id="260" r:id="Ra9edb4dc9f6a4ae0"/>
+    <p:sldId xmlns:r="http://schemas.openxmlformats.org/officeDocument/2006/relationships" id="261" r:id="R34c59c40e5b64cc6"/>
+    <p:sldId xmlns:r="http://schemas.openxmlformats.org/officeDocument/2006/relationships" id="262" r:id="R6792e1f857e3413d"/>
+    <p:sldId xmlns:r="http://schemas.openxmlformats.org/officeDocument/2006/relationships" id="263" r:id="R9e61e51e98c4410f"/>
   </p:sldIdLst>
   <p:sldSz cx="12192000" cy="6858000"/>
   <p:notesSz cx="6858000" cy="9144000"/>
@@ -1127,7 +1127,7 @@
   </p:cSld>
   <p:clrMap bg1="lt1" tx1="dk1" bg2="lt2" tx2="dk2" accent1="accent1" accent2="accent2" accent3="accent3" accent4="accent4" accent5="accent5" accent6="accent6" hlink="hlink" folHlink="folHlink"/>
   <p:sldLayoutIdLst>
-    <p:sldLayoutId xmlns:r="http://schemas.openxmlformats.org/officeDocument/2006/relationships" id="2147483649" r:id="Ref4238e164034680"/>
+    <p:sldLayoutId xmlns:r="http://schemas.openxmlformats.org/officeDocument/2006/relationships" id="2147483649" r:id="R4cd01b1f412044ad"/>
   </p:sldLayoutIdLst>
   <p:txStyles>
     <p:titleStyle>
@@ -1678,7 +1678,7 @@
           <p:cNvPr id="7" name="title-plane">
             <a:extLst xmlns:a="http://schemas.openxmlformats.org/drawingml/2006/main">
               <a:ext uri="{FF2B5EF4-FFF2-40B4-BE49-F238E27FC236}">
-                <a16:creationId xmlns:a16="http://schemas.microsoft.com/office/drawing/2014/main" id="{2BA76C15-C868-4F49-865D-C654B61FA13C}"/>
+                <a16:creationId xmlns:a16="http://schemas.microsoft.com/office/drawing/2014/main" id="{DBEE2930-37E5-40FD-B9FA-393B192A17E2}"/>
               </a:ext>
             </a:extLst>
           </p:cNvPr>
@@ -1713,8 +1713,8 @@
           <p:nvPr/>
         </p:nvPicPr>
         <p:blipFill>
-          <a:blip xmlns:r="http://schemas.openxmlformats.org/officeDocument/2006/relationships" xmlns:a="http://schemas.openxmlformats.org/drawingml/2006/main" r:embed="R4b2c59cede174e9c"/>
-          <a:srcRect xmlns:a="http://schemas.openxmlformats.org/drawingml/2006/main" l="30134" t="0" r="30134" b="0"/>
+          <a:blip xmlns:r="http://schemas.openxmlformats.org/officeDocument/2006/relationships" xmlns:a="http://schemas.openxmlformats.org/drawingml/2006/main" r:embed="R4f05c664772b4bb2"/>
+          <a:srcRect xmlns:a="http://schemas.openxmlformats.org/drawingml/2006/main" l="24074" t="0" r="24074" b="0"/>
           <a:stretch xmlns:a="http://schemas.openxmlformats.org/drawingml/2006/main">
             <a:fillRect l="0" t="0" r="0" b="0"/>
           </a:stretch>
@@ -1734,7 +1734,7 @@
           <p:cNvPr id="3" name="module-kicker">
             <a:extLst xmlns:a="http://schemas.openxmlformats.org/drawingml/2006/main">
               <a:ext uri="{FF2B5EF4-FFF2-40B4-BE49-F238E27FC236}">
-                <a16:creationId xmlns:a16="http://schemas.microsoft.com/office/drawing/2014/main" id="{AC2476BB-CB9E-4CD2-892C-131744E79C42}"/>
+                <a16:creationId xmlns:a16="http://schemas.microsoft.com/office/drawing/2014/main" id="{D36486E4-71C8-4C71-A459-572515B73D56}"/>
               </a:ext>
             </a:extLst>
           </p:cNvPr>
@@ -1784,7 +1784,7 @@
           <p:cNvPr id="4" name="deck-title">
             <a:extLst xmlns:a="http://schemas.openxmlformats.org/drawingml/2006/main">
               <a:ext uri="{FF2B5EF4-FFF2-40B4-BE49-F238E27FC236}">
-                <a16:creationId xmlns:a16="http://schemas.microsoft.com/office/drawing/2014/main" id="{92288557-DFC8-46BD-9D6B-525AF222A2F5}"/>
+                <a16:creationId xmlns:a16="http://schemas.microsoft.com/office/drawing/2014/main" id="{652B3828-EB4E-4697-8F41-507CCF1D48A7}"/>
               </a:ext>
             </a:extLst>
           </p:cNvPr>
@@ -1834,7 +1834,7 @@
           <p:cNvPr id="5" name="deck-subtitle">
             <a:extLst xmlns:a="http://schemas.openxmlformats.org/drawingml/2006/main">
               <a:ext uri="{FF2B5EF4-FFF2-40B4-BE49-F238E27FC236}">
-                <a16:creationId xmlns:a16="http://schemas.microsoft.com/office/drawing/2014/main" id="{93BA3A67-BA00-487A-B633-D98DD61B8221}"/>
+                <a16:creationId xmlns:a16="http://schemas.microsoft.com/office/drawing/2014/main" id="{AE042E6B-70E4-4E8E-BB0D-D5E396C42F32}"/>
               </a:ext>
             </a:extLst>
           </p:cNvPr>
@@ -1884,7 +1884,7 @@
           <p:cNvPr id="6" name="deck-footer">
             <a:extLst xmlns:a="http://schemas.openxmlformats.org/drawingml/2006/main">
               <a:ext uri="{FF2B5EF4-FFF2-40B4-BE49-F238E27FC236}">
-                <a16:creationId xmlns:a16="http://schemas.microsoft.com/office/drawing/2014/main" id="{337E46BC-2447-4655-AA07-06019C5F95FD}"/>
+                <a16:creationId xmlns:a16="http://schemas.microsoft.com/office/drawing/2014/main" id="{4446EC04-88E9-4EAF-AD8A-A8F023581A20}"/>
               </a:ext>
             </a:extLst>
           </p:cNvPr>
@@ -1932,7 +1932,7 @@
     </p:spTree>
     <p:extLst>
       <p:ext uri="{BB962C8B-B14F-4D97-AF65-F5344CB8AC3E}">
-        <p14:creationId xmlns:p14="http://schemas.microsoft.com/office/powerpoint/2010/main" val="1744550993"/>
+        <p14:creationId xmlns:p14="http://schemas.microsoft.com/office/powerpoint/2010/main" val="929584652"/>
       </p:ext>
     </p:extLst>
   </p:cSld>
@@ -1963,7 +1963,7 @@
           <p:cNvPr id="15" name="top-rule">
             <a:extLst xmlns:a="http://schemas.openxmlformats.org/drawingml/2006/main">
               <a:ext uri="{FF2B5EF4-FFF2-40B4-BE49-F238E27FC236}">
-                <a16:creationId xmlns:a16="http://schemas.microsoft.com/office/drawing/2014/main" id="{37B3A7A4-B058-4375-A568-4F64EB8A0000}"/>
+                <a16:creationId xmlns:a16="http://schemas.microsoft.com/office/drawing/2014/main" id="{F324BDC2-554B-46B9-B556-BC52A6444836}"/>
               </a:ext>
             </a:extLst>
           </p:cNvPr>
@@ -1994,7 +1994,7 @@
           <p:cNvPr id="2" name="course-label">
             <a:extLst xmlns:a="http://schemas.openxmlformats.org/drawingml/2006/main">
               <a:ext uri="{FF2B5EF4-FFF2-40B4-BE49-F238E27FC236}">
-                <a16:creationId xmlns:a16="http://schemas.microsoft.com/office/drawing/2014/main" id="{BC88BED9-9099-45A8-8364-972186CF2098}"/>
+                <a16:creationId xmlns:a16="http://schemas.microsoft.com/office/drawing/2014/main" id="{0EE3B34E-B7E1-440C-906B-5617C5FF21CC}"/>
               </a:ext>
             </a:extLst>
           </p:cNvPr>
@@ -2044,7 +2044,7 @@
           <p:cNvPr id="3" name="module-label">
             <a:extLst xmlns:a="http://schemas.openxmlformats.org/drawingml/2006/main">
               <a:ext uri="{FF2B5EF4-FFF2-40B4-BE49-F238E27FC236}">
-                <a16:creationId xmlns:a16="http://schemas.microsoft.com/office/drawing/2014/main" id="{2594F84F-4D33-4A2F-89EA-12DBC372D467}"/>
+                <a16:creationId xmlns:a16="http://schemas.microsoft.com/office/drawing/2014/main" id="{F7DE7D1E-EA5D-4859-AE1D-1D5A5B1F9EA4}"/>
               </a:ext>
             </a:extLst>
           </p:cNvPr>
@@ -2094,7 +2094,7 @@
           <p:cNvPr id="4" name="slide-title">
             <a:extLst xmlns:a="http://schemas.openxmlformats.org/drawingml/2006/main">
               <a:ext uri="{FF2B5EF4-FFF2-40B4-BE49-F238E27FC236}">
-                <a16:creationId xmlns:a16="http://schemas.microsoft.com/office/drawing/2014/main" id="{2BA06375-58CC-48F6-AB48-9E259A2F39AE}"/>
+                <a16:creationId xmlns:a16="http://schemas.microsoft.com/office/drawing/2014/main" id="{C3F084D4-7636-414A-836D-444BA47EB3B5}"/>
               </a:ext>
             </a:extLst>
           </p:cNvPr>
@@ -2144,7 +2144,7 @@
           <p:cNvPr id="5" name="slide-subtitle">
             <a:extLst xmlns:a="http://schemas.openxmlformats.org/drawingml/2006/main">
               <a:ext uri="{FF2B5EF4-FFF2-40B4-BE49-F238E27FC236}">
-                <a16:creationId xmlns:a16="http://schemas.microsoft.com/office/drawing/2014/main" id="{0F4B204C-CF9C-4C08-B0F8-14FF1FC16AAB}"/>
+                <a16:creationId xmlns:a16="http://schemas.microsoft.com/office/drawing/2014/main" id="{61E7B480-AC2F-45D5-A389-BF864B5394EB}"/>
               </a:ext>
             </a:extLst>
           </p:cNvPr>
@@ -2194,7 +2194,7 @@
           <p:cNvPr id="6" name="bullet-1">
             <a:extLst xmlns:a="http://schemas.openxmlformats.org/drawingml/2006/main">
               <a:ext uri="{FF2B5EF4-FFF2-40B4-BE49-F238E27FC236}">
-                <a16:creationId xmlns:a16="http://schemas.microsoft.com/office/drawing/2014/main" id="{275C9F19-003E-4506-8DFD-99A405170AD5}"/>
+                <a16:creationId xmlns:a16="http://schemas.microsoft.com/office/drawing/2014/main" id="{816A6F19-418C-4FB9-A5F5-BBA3D4138CE2}"/>
               </a:ext>
             </a:extLst>
           </p:cNvPr>
@@ -2225,7 +2225,7 @@
           <p:cNvPr id="7" name="bullet-number-1">
             <a:extLst xmlns:a="http://schemas.openxmlformats.org/drawingml/2006/main">
               <a:ext uri="{FF2B5EF4-FFF2-40B4-BE49-F238E27FC236}">
-                <a16:creationId xmlns:a16="http://schemas.microsoft.com/office/drawing/2014/main" id="{D0AFA450-22FC-4375-9FFA-089D023B8A42}"/>
+                <a16:creationId xmlns:a16="http://schemas.microsoft.com/office/drawing/2014/main" id="{2F7441AC-8104-44BB-BAE1-C5640C020895}"/>
               </a:ext>
             </a:extLst>
           </p:cNvPr>
@@ -2275,7 +2275,7 @@
           <p:cNvPr id="8" name="bullet-copy-1">
             <a:extLst xmlns:a="http://schemas.openxmlformats.org/drawingml/2006/main">
               <a:ext uri="{FF2B5EF4-FFF2-40B4-BE49-F238E27FC236}">
-                <a16:creationId xmlns:a16="http://schemas.microsoft.com/office/drawing/2014/main" id="{048042CB-50C7-459E-8AD7-F50536D08642}"/>
+                <a16:creationId xmlns:a16="http://schemas.microsoft.com/office/drawing/2014/main" id="{1D361E49-32E3-4A68-AB35-041BB630B436}"/>
               </a:ext>
             </a:extLst>
           </p:cNvPr>
@@ -2325,7 +2325,7 @@
           <p:cNvPr id="9" name="bullet-2">
             <a:extLst xmlns:a="http://schemas.openxmlformats.org/drawingml/2006/main">
               <a:ext uri="{FF2B5EF4-FFF2-40B4-BE49-F238E27FC236}">
-                <a16:creationId xmlns:a16="http://schemas.microsoft.com/office/drawing/2014/main" id="{E04928F7-1CEA-4BD4-8490-93AD183D52EA}"/>
+                <a16:creationId xmlns:a16="http://schemas.microsoft.com/office/drawing/2014/main" id="{E5916266-2FEE-47EA-A0C6-9528B62712CC}"/>
               </a:ext>
             </a:extLst>
           </p:cNvPr>
@@ -2356,7 +2356,7 @@
           <p:cNvPr id="10" name="bullet-number-2">
             <a:extLst xmlns:a="http://schemas.openxmlformats.org/drawingml/2006/main">
               <a:ext uri="{FF2B5EF4-FFF2-40B4-BE49-F238E27FC236}">
-                <a16:creationId xmlns:a16="http://schemas.microsoft.com/office/drawing/2014/main" id="{01327014-FE66-4AF8-A5D5-88F05BCB61F3}"/>
+                <a16:creationId xmlns:a16="http://schemas.microsoft.com/office/drawing/2014/main" id="{2987BE97-F9A3-4CDD-B8B1-A47F3CC2DA94}"/>
               </a:ext>
             </a:extLst>
           </p:cNvPr>
@@ -2406,7 +2406,7 @@
           <p:cNvPr id="11" name="bullet-copy-2">
             <a:extLst xmlns:a="http://schemas.openxmlformats.org/drawingml/2006/main">
               <a:ext uri="{FF2B5EF4-FFF2-40B4-BE49-F238E27FC236}">
-                <a16:creationId xmlns:a16="http://schemas.microsoft.com/office/drawing/2014/main" id="{F57F3444-0638-4DAD-8FE8-C1B4D492FE9B}"/>
+                <a16:creationId xmlns:a16="http://schemas.microsoft.com/office/drawing/2014/main" id="{8CBF0482-7FDD-49EA-915C-1FA500EC346E}"/>
               </a:ext>
             </a:extLst>
           </p:cNvPr>
@@ -2456,7 +2456,7 @@
           <p:cNvPr id="12" name="bullet-3">
             <a:extLst xmlns:a="http://schemas.openxmlformats.org/drawingml/2006/main">
               <a:ext uri="{FF2B5EF4-FFF2-40B4-BE49-F238E27FC236}">
-                <a16:creationId xmlns:a16="http://schemas.microsoft.com/office/drawing/2014/main" id="{49800125-A704-4C22-A59D-BD2B146D5450}"/>
+                <a16:creationId xmlns:a16="http://schemas.microsoft.com/office/drawing/2014/main" id="{F8454587-AE9A-436E-80DA-9C36741F383D}"/>
               </a:ext>
             </a:extLst>
           </p:cNvPr>
@@ -2487,7 +2487,7 @@
           <p:cNvPr id="13" name="bullet-number-3">
             <a:extLst xmlns:a="http://schemas.openxmlformats.org/drawingml/2006/main">
               <a:ext uri="{FF2B5EF4-FFF2-40B4-BE49-F238E27FC236}">
-                <a16:creationId xmlns:a16="http://schemas.microsoft.com/office/drawing/2014/main" id="{0D4D92F8-39F9-410F-BBC5-AC4E65C0935F}"/>
+                <a16:creationId xmlns:a16="http://schemas.microsoft.com/office/drawing/2014/main" id="{6D55DD83-4F38-4A75-8FA6-001DA76D7F59}"/>
               </a:ext>
             </a:extLst>
           </p:cNvPr>
@@ -2537,7 +2537,7 @@
           <p:cNvPr id="14" name="bullet-copy-3">
             <a:extLst xmlns:a="http://schemas.openxmlformats.org/drawingml/2006/main">
               <a:ext uri="{FF2B5EF4-FFF2-40B4-BE49-F238E27FC236}">
-                <a16:creationId xmlns:a16="http://schemas.microsoft.com/office/drawing/2014/main" id="{4CDD8366-08CC-4189-9C72-EC2BAAB49BC3}"/>
+                <a16:creationId xmlns:a16="http://schemas.microsoft.com/office/drawing/2014/main" id="{2B4AB315-D10E-42CA-A80B-85C6FC9284BA}"/>
               </a:ext>
             </a:extLst>
           </p:cNvPr>
@@ -2585,7 +2585,7 @@
     </p:spTree>
     <p:extLst>
       <p:ext uri="{BB962C8B-B14F-4D97-AF65-F5344CB8AC3E}">
-        <p14:creationId xmlns:p14="http://schemas.microsoft.com/office/powerpoint/2010/main" val="372955050"/>
+        <p14:creationId xmlns:p14="http://schemas.microsoft.com/office/powerpoint/2010/main" val="1033435248"/>
       </p:ext>
     </p:extLst>
   </p:cSld>
@@ -2616,7 +2616,7 @@
           <p:cNvPr id="15" name="top-rule">
             <a:extLst xmlns:a="http://schemas.openxmlformats.org/drawingml/2006/main">
               <a:ext uri="{FF2B5EF4-FFF2-40B4-BE49-F238E27FC236}">
-                <a16:creationId xmlns:a16="http://schemas.microsoft.com/office/drawing/2014/main" id="{7BC35AC9-C28A-443E-AA7E-45BD4D853000}"/>
+                <a16:creationId xmlns:a16="http://schemas.microsoft.com/office/drawing/2014/main" id="{4E770C6F-D80B-495D-87CC-3F8F945CBC9A}"/>
               </a:ext>
             </a:extLst>
           </p:cNvPr>
@@ -2647,7 +2647,7 @@
           <p:cNvPr id="2" name="course-label">
             <a:extLst xmlns:a="http://schemas.openxmlformats.org/drawingml/2006/main">
               <a:ext uri="{FF2B5EF4-FFF2-40B4-BE49-F238E27FC236}">
-                <a16:creationId xmlns:a16="http://schemas.microsoft.com/office/drawing/2014/main" id="{8CF1D9C6-3865-4AFB-8CEA-730EDF212F92}"/>
+                <a16:creationId xmlns:a16="http://schemas.microsoft.com/office/drawing/2014/main" id="{EBB21284-5234-4CF2-9AF6-2139754652AC}"/>
               </a:ext>
             </a:extLst>
           </p:cNvPr>
@@ -2697,7 +2697,7 @@
           <p:cNvPr id="3" name="module-label">
             <a:extLst xmlns:a="http://schemas.openxmlformats.org/drawingml/2006/main">
               <a:ext uri="{FF2B5EF4-FFF2-40B4-BE49-F238E27FC236}">
-                <a16:creationId xmlns:a16="http://schemas.microsoft.com/office/drawing/2014/main" id="{359A2657-790B-4CA8-9BE0-C426F8E3EBD0}"/>
+                <a16:creationId xmlns:a16="http://schemas.microsoft.com/office/drawing/2014/main" id="{84796C8B-7908-42A0-8501-24153BB48292}"/>
               </a:ext>
             </a:extLst>
           </p:cNvPr>
@@ -2747,7 +2747,7 @@
           <p:cNvPr id="4" name="slide-title">
             <a:extLst xmlns:a="http://schemas.openxmlformats.org/drawingml/2006/main">
               <a:ext uri="{FF2B5EF4-FFF2-40B4-BE49-F238E27FC236}">
-                <a16:creationId xmlns:a16="http://schemas.microsoft.com/office/drawing/2014/main" id="{38E77231-FB17-4216-BD17-75CEE4271EE8}"/>
+                <a16:creationId xmlns:a16="http://schemas.microsoft.com/office/drawing/2014/main" id="{42C0F2B9-51C6-4249-B917-7B840B3B8A05}"/>
               </a:ext>
             </a:extLst>
           </p:cNvPr>
@@ -2797,7 +2797,7 @@
           <p:cNvPr id="5" name="slide-subtitle">
             <a:extLst xmlns:a="http://schemas.openxmlformats.org/drawingml/2006/main">
               <a:ext uri="{FF2B5EF4-FFF2-40B4-BE49-F238E27FC236}">
-                <a16:creationId xmlns:a16="http://schemas.microsoft.com/office/drawing/2014/main" id="{9892DD23-5201-4849-97C3-F9C90B0D5A45}"/>
+                <a16:creationId xmlns:a16="http://schemas.microsoft.com/office/drawing/2014/main" id="{2CE73BA4-EC78-45B8-9CD7-8F0D254507EF}"/>
               </a:ext>
             </a:extLst>
           </p:cNvPr>
@@ -2847,7 +2847,7 @@
           <p:cNvPr id="6" name="bullet-1">
             <a:extLst xmlns:a="http://schemas.openxmlformats.org/drawingml/2006/main">
               <a:ext uri="{FF2B5EF4-FFF2-40B4-BE49-F238E27FC236}">
-                <a16:creationId xmlns:a16="http://schemas.microsoft.com/office/drawing/2014/main" id="{CFB612E8-7C7A-485C-AA17-52F7A2E8555C}"/>
+                <a16:creationId xmlns:a16="http://schemas.microsoft.com/office/drawing/2014/main" id="{D3A3412A-28DD-490D-83CF-A49A03B626A4}"/>
               </a:ext>
             </a:extLst>
           </p:cNvPr>
@@ -2878,7 +2878,7 @@
           <p:cNvPr id="7" name="bullet-number-1">
             <a:extLst xmlns:a="http://schemas.openxmlformats.org/drawingml/2006/main">
               <a:ext uri="{FF2B5EF4-FFF2-40B4-BE49-F238E27FC236}">
-                <a16:creationId xmlns:a16="http://schemas.microsoft.com/office/drawing/2014/main" id="{3D86BC3A-8565-4D8F-87C9-00BAA72628A8}"/>
+                <a16:creationId xmlns:a16="http://schemas.microsoft.com/office/drawing/2014/main" id="{90E22ED2-B069-4AFB-AD29-A1001F89EED8}"/>
               </a:ext>
             </a:extLst>
           </p:cNvPr>
@@ -2928,7 +2928,7 @@
           <p:cNvPr id="8" name="bullet-copy-1">
             <a:extLst xmlns:a="http://schemas.openxmlformats.org/drawingml/2006/main">
               <a:ext uri="{FF2B5EF4-FFF2-40B4-BE49-F238E27FC236}">
-                <a16:creationId xmlns:a16="http://schemas.microsoft.com/office/drawing/2014/main" id="{6E9D3FC5-A023-4F7B-AB3D-FD7F1C76D3B8}"/>
+                <a16:creationId xmlns:a16="http://schemas.microsoft.com/office/drawing/2014/main" id="{9ACDA5B3-8FED-4114-985E-76CCD6150DEB}"/>
               </a:ext>
             </a:extLst>
           </p:cNvPr>
@@ -2978,7 +2978,7 @@
           <p:cNvPr id="9" name="bullet-2">
             <a:extLst xmlns:a="http://schemas.openxmlformats.org/drawingml/2006/main">
               <a:ext uri="{FF2B5EF4-FFF2-40B4-BE49-F238E27FC236}">
-                <a16:creationId xmlns:a16="http://schemas.microsoft.com/office/drawing/2014/main" id="{E347B93B-393E-400C-A94E-ECC0EFAA923C}"/>
+                <a16:creationId xmlns:a16="http://schemas.microsoft.com/office/drawing/2014/main" id="{F93C2C4D-687D-461E-82F0-B75059FF6184}"/>
               </a:ext>
             </a:extLst>
           </p:cNvPr>
@@ -3009,7 +3009,7 @@
           <p:cNvPr id="10" name="bullet-number-2">
             <a:extLst xmlns:a="http://schemas.openxmlformats.org/drawingml/2006/main">
               <a:ext uri="{FF2B5EF4-FFF2-40B4-BE49-F238E27FC236}">
-                <a16:creationId xmlns:a16="http://schemas.microsoft.com/office/drawing/2014/main" id="{17C5CC9B-FC18-4EC7-9B14-55CDBB797E96}"/>
+                <a16:creationId xmlns:a16="http://schemas.microsoft.com/office/drawing/2014/main" id="{69BB1C1F-777A-4DBA-8587-CD887BC4A324}"/>
               </a:ext>
             </a:extLst>
           </p:cNvPr>
@@ -3059,7 +3059,7 @@
           <p:cNvPr id="11" name="bullet-copy-2">
             <a:extLst xmlns:a="http://schemas.openxmlformats.org/drawingml/2006/main">
               <a:ext uri="{FF2B5EF4-FFF2-40B4-BE49-F238E27FC236}">
-                <a16:creationId xmlns:a16="http://schemas.microsoft.com/office/drawing/2014/main" id="{DEDC067A-64F5-4D64-B5D0-D39B57028BD8}"/>
+                <a16:creationId xmlns:a16="http://schemas.microsoft.com/office/drawing/2014/main" id="{D8BB63D9-0B27-4120-A779-F984B15F019B}"/>
               </a:ext>
             </a:extLst>
           </p:cNvPr>
@@ -3099,7 +3099,7 @@
                   <a:srgbClr val="16343A"/>
                 </a:solidFill>
               </a:rPr>
-              <a:t>Useful research records the source, identifies a feature and explains how it may influence the project.</a:t>
+              <a:t>Good research compares patterns across products.</a:t>
             </a:r>
           </a:p>
         </p:txBody>
@@ -3109,7 +3109,7 @@
           <p:cNvPr id="12" name="bullet-3">
             <a:extLst xmlns:a="http://schemas.openxmlformats.org/drawingml/2006/main">
               <a:ext uri="{FF2B5EF4-FFF2-40B4-BE49-F238E27FC236}">
-                <a16:creationId xmlns:a16="http://schemas.microsoft.com/office/drawing/2014/main" id="{FB724AB6-4222-4354-B968-D4E768940C49}"/>
+                <a16:creationId xmlns:a16="http://schemas.microsoft.com/office/drawing/2014/main" id="{04E260CA-E4F2-4F5C-AA04-C7EB583E0E85}"/>
               </a:ext>
             </a:extLst>
           </p:cNvPr>
@@ -3140,7 +3140,7 @@
           <p:cNvPr id="13" name="bullet-number-3">
             <a:extLst xmlns:a="http://schemas.openxmlformats.org/drawingml/2006/main">
               <a:ext uri="{FF2B5EF4-FFF2-40B4-BE49-F238E27FC236}">
-                <a16:creationId xmlns:a16="http://schemas.microsoft.com/office/drawing/2014/main" id="{35C7267E-FA2F-4A4E-AC6C-2F04A04C50BC}"/>
+                <a16:creationId xmlns:a16="http://schemas.microsoft.com/office/drawing/2014/main" id="{BB80D497-133D-4526-BDA5-12D9C605C60E}"/>
               </a:ext>
             </a:extLst>
           </p:cNvPr>
@@ -3190,7 +3190,7 @@
           <p:cNvPr id="14" name="bullet-copy-3">
             <a:extLst xmlns:a="http://schemas.openxmlformats.org/drawingml/2006/main">
               <a:ext uri="{FF2B5EF4-FFF2-40B4-BE49-F238E27FC236}">
-                <a16:creationId xmlns:a16="http://schemas.microsoft.com/office/drawing/2014/main" id="{2B2B196F-3D04-46A6-886B-63671E5D2BB4}"/>
+                <a16:creationId xmlns:a16="http://schemas.microsoft.com/office/drawing/2014/main" id="{2DEE4DC9-A78A-4F75-B564-80EB09AED4D0}"/>
               </a:ext>
             </a:extLst>
           </p:cNvPr>
@@ -3230,7 +3230,7 @@
                   <a:srgbClr val="16343A"/>
                 </a:solidFill>
               </a:rPr>
-              <a:t>Do not copy a complete product.</a:t>
+              <a:t>A clear opening from one product and a compact carrying idea from another can inspire a new response, provided the final design fits the brief and approved constructi…</a:t>
             </a:r>
           </a:p>
         </p:txBody>
@@ -3238,7 +3238,7 @@
     </p:spTree>
     <p:extLst>
       <p:ext uri="{BB962C8B-B14F-4D97-AF65-F5344CB8AC3E}">
-        <p14:creationId xmlns:p14="http://schemas.microsoft.com/office/powerpoint/2010/main" val="282583746"/>
+        <p14:creationId xmlns:p14="http://schemas.microsoft.com/office/powerpoint/2010/main" val="403430949"/>
       </p:ext>
     </p:extLst>
   </p:cSld>
@@ -3269,7 +3269,7 @@
           <p:cNvPr id="12" name="top-rule">
             <a:extLst xmlns:a="http://schemas.openxmlformats.org/drawingml/2006/main">
               <a:ext uri="{FF2B5EF4-FFF2-40B4-BE49-F238E27FC236}">
-                <a16:creationId xmlns:a16="http://schemas.microsoft.com/office/drawing/2014/main" id="{BD3289B3-596A-4B12-A35C-2B1577EBD9C7}"/>
+                <a16:creationId xmlns:a16="http://schemas.microsoft.com/office/drawing/2014/main" id="{6AB6B643-5494-4C4D-85CC-5DF6324AE0A4}"/>
               </a:ext>
             </a:extLst>
           </p:cNvPr>
@@ -3300,7 +3300,7 @@
           <p:cNvPr id="2" name="course-label">
             <a:extLst xmlns:a="http://schemas.openxmlformats.org/drawingml/2006/main">
               <a:ext uri="{FF2B5EF4-FFF2-40B4-BE49-F238E27FC236}">
-                <a16:creationId xmlns:a16="http://schemas.microsoft.com/office/drawing/2014/main" id="{8362E792-CFC0-4BF7-92FD-A341DB17BE2B}"/>
+                <a16:creationId xmlns:a16="http://schemas.microsoft.com/office/drawing/2014/main" id="{37D4F2AC-AD9B-4278-84C4-7771FDBC064B}"/>
               </a:ext>
             </a:extLst>
           </p:cNvPr>
@@ -3350,7 +3350,7 @@
           <p:cNvPr id="3" name="module-label">
             <a:extLst xmlns:a="http://schemas.openxmlformats.org/drawingml/2006/main">
               <a:ext uri="{FF2B5EF4-FFF2-40B4-BE49-F238E27FC236}">
-                <a16:creationId xmlns:a16="http://schemas.microsoft.com/office/drawing/2014/main" id="{3ED9B51C-5644-4388-A3F9-663014362545}"/>
+                <a16:creationId xmlns:a16="http://schemas.microsoft.com/office/drawing/2014/main" id="{E3F6FD72-2E56-4254-8703-4AF9C56F6AD3}"/>
               </a:ext>
             </a:extLst>
           </p:cNvPr>
@@ -3400,7 +3400,7 @@
           <p:cNvPr id="4" name="slide-title">
             <a:extLst xmlns:a="http://schemas.openxmlformats.org/drawingml/2006/main">
               <a:ext uri="{FF2B5EF4-FFF2-40B4-BE49-F238E27FC236}">
-                <a16:creationId xmlns:a16="http://schemas.microsoft.com/office/drawing/2014/main" id="{7C287F3A-0C68-4CF0-921B-BC1411CF6C15}"/>
+                <a16:creationId xmlns:a16="http://schemas.microsoft.com/office/drawing/2014/main" id="{06A895A1-8CCB-43ED-907D-7A6031A11369}"/>
               </a:ext>
             </a:extLst>
           </p:cNvPr>
@@ -3450,7 +3450,7 @@
           <p:cNvPr id="5" name="slide-subtitle">
             <a:extLst xmlns:a="http://schemas.openxmlformats.org/drawingml/2006/main">
               <a:ext uri="{FF2B5EF4-FFF2-40B4-BE49-F238E27FC236}">
-                <a16:creationId xmlns:a16="http://schemas.microsoft.com/office/drawing/2014/main" id="{7E9E2810-FC0D-4845-90DC-BE1F39E2D810}"/>
+                <a16:creationId xmlns:a16="http://schemas.microsoft.com/office/drawing/2014/main" id="{FF444161-FC4A-4674-AC2A-0B22AB484951}"/>
               </a:ext>
             </a:extLst>
           </p:cNvPr>
@@ -3500,7 +3500,7 @@
           <p:cNvPr id="6" name="prompt-accent">
             <a:extLst xmlns:a="http://schemas.openxmlformats.org/drawingml/2006/main">
               <a:ext uri="{FF2B5EF4-FFF2-40B4-BE49-F238E27FC236}">
-                <a16:creationId xmlns:a16="http://schemas.microsoft.com/office/drawing/2014/main" id="{F7BAE99D-590A-4AF3-8771-479F0395BE2F}"/>
+                <a16:creationId xmlns:a16="http://schemas.microsoft.com/office/drawing/2014/main" id="{71EA343A-F332-4B09-9140-DE39F2139E69}"/>
               </a:ext>
             </a:extLst>
           </p:cNvPr>
@@ -3531,7 +3531,7 @@
           <p:cNvPr id="7" name="plain-language">
             <a:extLst xmlns:a="http://schemas.openxmlformats.org/drawingml/2006/main">
               <a:ext uri="{FF2B5EF4-FFF2-40B4-BE49-F238E27FC236}">
-                <a16:creationId xmlns:a16="http://schemas.microsoft.com/office/drawing/2014/main" id="{FF718047-3F30-4E1A-AE0C-9F3ED3AA8B9E}"/>
+                <a16:creationId xmlns:a16="http://schemas.microsoft.com/office/drawing/2014/main" id="{C79B2DC9-8EFB-41CB-A80A-3D88B93B16F9}"/>
               </a:ext>
             </a:extLst>
           </p:cNvPr>
@@ -3581,7 +3581,7 @@
           <p:cNvPr id="8" name="clarify">
             <a:extLst xmlns:a="http://schemas.openxmlformats.org/drawingml/2006/main">
               <a:ext uri="{FF2B5EF4-FFF2-40B4-BE49-F238E27FC236}">
-                <a16:creationId xmlns:a16="http://schemas.microsoft.com/office/drawing/2014/main" id="{28801D86-64A1-4C23-862F-2E3287C8C6AA}"/>
+                <a16:creationId xmlns:a16="http://schemas.microsoft.com/office/drawing/2014/main" id="{9B709525-CAD9-4946-ADE4-AFD7D70A9E54}"/>
               </a:ext>
             </a:extLst>
           </p:cNvPr>
@@ -3631,7 +3631,7 @@
           <p:cNvPr id="9" name="starter-label">
             <a:extLst xmlns:a="http://schemas.openxmlformats.org/drawingml/2006/main">
               <a:ext uri="{FF2B5EF4-FFF2-40B4-BE49-F238E27FC236}">
-                <a16:creationId xmlns:a16="http://schemas.microsoft.com/office/drawing/2014/main" id="{7435102A-90E9-48D2-9CCE-D5E4E3F1F61E}"/>
+                <a16:creationId xmlns:a16="http://schemas.microsoft.com/office/drawing/2014/main" id="{5912DF99-B9F5-4945-B25D-8A36C46DABFF}"/>
               </a:ext>
             </a:extLst>
           </p:cNvPr>
@@ -3681,7 +3681,7 @@
           <p:cNvPr id="10" name="starter">
             <a:extLst xmlns:a="http://schemas.openxmlformats.org/drawingml/2006/main">
               <a:ext uri="{FF2B5EF4-FFF2-40B4-BE49-F238E27FC236}">
-                <a16:creationId xmlns:a16="http://schemas.microsoft.com/office/drawing/2014/main" id="{1DC4B865-60D6-486D-A4D3-2F37431D1632}"/>
+                <a16:creationId xmlns:a16="http://schemas.microsoft.com/office/drawing/2014/main" id="{0ECE3146-688C-4B68-BEF4-6ED79E751ACA}"/>
               </a:ext>
             </a:extLst>
           </p:cNvPr>
@@ -3731,7 +3731,7 @@
           <p:cNvPr id="11" name="action">
             <a:extLst xmlns:a="http://schemas.openxmlformats.org/drawingml/2006/main">
               <a:ext uri="{FF2B5EF4-FFF2-40B4-BE49-F238E27FC236}">
-                <a16:creationId xmlns:a16="http://schemas.microsoft.com/office/drawing/2014/main" id="{321F3D41-2F27-4C62-8EF0-F3682CF0AC2E}"/>
+                <a16:creationId xmlns:a16="http://schemas.microsoft.com/office/drawing/2014/main" id="{155F21C8-5843-4DC4-ACC1-FBC9DAD36A70}"/>
               </a:ext>
             </a:extLst>
           </p:cNvPr>
@@ -3779,7 +3779,7 @@
     </p:spTree>
     <p:extLst>
       <p:ext uri="{BB962C8B-B14F-4D97-AF65-F5344CB8AC3E}">
-        <p14:creationId xmlns:p14="http://schemas.microsoft.com/office/powerpoint/2010/main" val="1472233377"/>
+        <p14:creationId xmlns:p14="http://schemas.microsoft.com/office/powerpoint/2010/main" val="1422687970"/>
       </p:ext>
     </p:extLst>
   </p:cSld>
@@ -3810,7 +3810,7 @@
           <p:cNvPr id="15" name="top-rule">
             <a:extLst xmlns:a="http://schemas.openxmlformats.org/drawingml/2006/main">
               <a:ext uri="{FF2B5EF4-FFF2-40B4-BE49-F238E27FC236}">
-                <a16:creationId xmlns:a16="http://schemas.microsoft.com/office/drawing/2014/main" id="{D99EF933-AE6D-482E-A700-5ECF640DE423}"/>
+                <a16:creationId xmlns:a16="http://schemas.microsoft.com/office/drawing/2014/main" id="{5D651C00-9367-4FD2-A9ED-3CB33F981742}"/>
               </a:ext>
             </a:extLst>
           </p:cNvPr>
@@ -3841,7 +3841,7 @@
           <p:cNvPr id="2" name="course-label">
             <a:extLst xmlns:a="http://schemas.openxmlformats.org/drawingml/2006/main">
               <a:ext uri="{FF2B5EF4-FFF2-40B4-BE49-F238E27FC236}">
-                <a16:creationId xmlns:a16="http://schemas.microsoft.com/office/drawing/2014/main" id="{761F5851-0547-465B-8E04-B29B21512216}"/>
+                <a16:creationId xmlns:a16="http://schemas.microsoft.com/office/drawing/2014/main" id="{7DD5260C-5493-4F0C-A158-5B7161D77402}"/>
               </a:ext>
             </a:extLst>
           </p:cNvPr>
@@ -3891,7 +3891,7 @@
           <p:cNvPr id="3" name="module-label">
             <a:extLst xmlns:a="http://schemas.openxmlformats.org/drawingml/2006/main">
               <a:ext uri="{FF2B5EF4-FFF2-40B4-BE49-F238E27FC236}">
-                <a16:creationId xmlns:a16="http://schemas.microsoft.com/office/drawing/2014/main" id="{D585F4BE-66E5-4509-BFF1-3662F509C9B5}"/>
+                <a16:creationId xmlns:a16="http://schemas.microsoft.com/office/drawing/2014/main" id="{C28E9D68-2ACE-461E-972E-6C7A4F13FAE5}"/>
               </a:ext>
             </a:extLst>
           </p:cNvPr>
@@ -3941,7 +3941,7 @@
           <p:cNvPr id="4" name="slide-title">
             <a:extLst xmlns:a="http://schemas.openxmlformats.org/drawingml/2006/main">
               <a:ext uri="{FF2B5EF4-FFF2-40B4-BE49-F238E27FC236}">
-                <a16:creationId xmlns:a16="http://schemas.microsoft.com/office/drawing/2014/main" id="{FF354C1F-D5E6-4B54-B70E-6873D82C8D40}"/>
+                <a16:creationId xmlns:a16="http://schemas.microsoft.com/office/drawing/2014/main" id="{DF297114-289B-4BA2-B913-D8130A279DDD}"/>
               </a:ext>
             </a:extLst>
           </p:cNvPr>
@@ -3991,7 +3991,7 @@
           <p:cNvPr id="5" name="slide-subtitle">
             <a:extLst xmlns:a="http://schemas.openxmlformats.org/drawingml/2006/main">
               <a:ext uri="{FF2B5EF4-FFF2-40B4-BE49-F238E27FC236}">
-                <a16:creationId xmlns:a16="http://schemas.microsoft.com/office/drawing/2014/main" id="{25282C3E-A8EE-4A8E-8956-37BACDC0699C}"/>
+                <a16:creationId xmlns:a16="http://schemas.microsoft.com/office/drawing/2014/main" id="{14DC5F7A-5372-49AC-9789-CC18C2DEB854}"/>
               </a:ext>
             </a:extLst>
           </p:cNvPr>
@@ -4041,7 +4041,7 @@
           <p:cNvPr id="6" name="bullet-1">
             <a:extLst xmlns:a="http://schemas.openxmlformats.org/drawingml/2006/main">
               <a:ext uri="{FF2B5EF4-FFF2-40B4-BE49-F238E27FC236}">
-                <a16:creationId xmlns:a16="http://schemas.microsoft.com/office/drawing/2014/main" id="{F0CE655F-EBD4-4CAC-A024-6F424F5EF5FE}"/>
+                <a16:creationId xmlns:a16="http://schemas.microsoft.com/office/drawing/2014/main" id="{413ACCE8-6EC3-4A8C-AC99-251C32BCEF2E}"/>
               </a:ext>
             </a:extLst>
           </p:cNvPr>
@@ -4072,7 +4072,7 @@
           <p:cNvPr id="7" name="bullet-number-1">
             <a:extLst xmlns:a="http://schemas.openxmlformats.org/drawingml/2006/main">
               <a:ext uri="{FF2B5EF4-FFF2-40B4-BE49-F238E27FC236}">
-                <a16:creationId xmlns:a16="http://schemas.microsoft.com/office/drawing/2014/main" id="{48528EB6-5590-4D52-92B0-1C7508043D15}"/>
+                <a16:creationId xmlns:a16="http://schemas.microsoft.com/office/drawing/2014/main" id="{1282E834-0CB9-48BA-89B2-5521887A475C}"/>
               </a:ext>
             </a:extLst>
           </p:cNvPr>
@@ -4122,7 +4122,7 @@
           <p:cNvPr id="8" name="bullet-copy-1">
             <a:extLst xmlns:a="http://schemas.openxmlformats.org/drawingml/2006/main">
               <a:ext uri="{FF2B5EF4-FFF2-40B4-BE49-F238E27FC236}">
-                <a16:creationId xmlns:a16="http://schemas.microsoft.com/office/drawing/2014/main" id="{56C138EB-AB19-4B53-8AAC-19B4490F58DF}"/>
+                <a16:creationId xmlns:a16="http://schemas.microsoft.com/office/drawing/2014/main" id="{4EFA5747-3D8E-4EC5-A037-8F46643AB2C3}"/>
               </a:ext>
             </a:extLst>
           </p:cNvPr>
@@ -4172,7 +4172,7 @@
           <p:cNvPr id="9" name="bullet-2">
             <a:extLst xmlns:a="http://schemas.openxmlformats.org/drawingml/2006/main">
               <a:ext uri="{FF2B5EF4-FFF2-40B4-BE49-F238E27FC236}">
-                <a16:creationId xmlns:a16="http://schemas.microsoft.com/office/drawing/2014/main" id="{79555E64-DC90-40AF-9193-A5F53D251996}"/>
+                <a16:creationId xmlns:a16="http://schemas.microsoft.com/office/drawing/2014/main" id="{316BDE86-3F9B-4EF0-8543-653323CB60A4}"/>
               </a:ext>
             </a:extLst>
           </p:cNvPr>
@@ -4203,7 +4203,7 @@
           <p:cNvPr id="10" name="bullet-number-2">
             <a:extLst xmlns:a="http://schemas.openxmlformats.org/drawingml/2006/main">
               <a:ext uri="{FF2B5EF4-FFF2-40B4-BE49-F238E27FC236}">
-                <a16:creationId xmlns:a16="http://schemas.microsoft.com/office/drawing/2014/main" id="{9AF98873-0BB8-473C-920C-C06634B6E296}"/>
+                <a16:creationId xmlns:a16="http://schemas.microsoft.com/office/drawing/2014/main" id="{923DCBA3-0D3A-46A3-9FCD-D03006C04895}"/>
               </a:ext>
             </a:extLst>
           </p:cNvPr>
@@ -4253,7 +4253,7 @@
           <p:cNvPr id="11" name="bullet-copy-2">
             <a:extLst xmlns:a="http://schemas.openxmlformats.org/drawingml/2006/main">
               <a:ext uri="{FF2B5EF4-FFF2-40B4-BE49-F238E27FC236}">
-                <a16:creationId xmlns:a16="http://schemas.microsoft.com/office/drawing/2014/main" id="{F502E954-CE08-4A2D-B317-D9AF51F52632}"/>
+                <a16:creationId xmlns:a16="http://schemas.microsoft.com/office/drawing/2014/main" id="{EBA3364D-53DC-4CD6-B2CF-A73B0A97F632}"/>
               </a:ext>
             </a:extLst>
           </p:cNvPr>
@@ -4293,7 +4293,7 @@
                   <a:srgbClr val="16343A"/>
                 </a:solidFill>
               </a:rPr>
-              <a:t>Change meaningful features such as shape, proportion, closure, handle, pocket, colour arrangement or decorative technique.</a:t>
+              <a:t>Add annotations that explain function, material, construction, safety or user benefit.</a:t>
             </a:r>
           </a:p>
         </p:txBody>
@@ -4303,7 +4303,7 @@
           <p:cNvPr id="12" name="bullet-3">
             <a:extLst xmlns:a="http://schemas.openxmlformats.org/drawingml/2006/main">
               <a:ext uri="{FF2B5EF4-FFF2-40B4-BE49-F238E27FC236}">
-                <a16:creationId xmlns:a16="http://schemas.microsoft.com/office/drawing/2014/main" id="{DFB6D085-4200-4272-838B-38522F91DBAC}"/>
+                <a16:creationId xmlns:a16="http://schemas.microsoft.com/office/drawing/2014/main" id="{AEF4D00B-7A2F-43D7-8D2B-C4663EF49AA1}"/>
               </a:ext>
             </a:extLst>
           </p:cNvPr>
@@ -4334,7 +4334,7 @@
           <p:cNvPr id="13" name="bullet-number-3">
             <a:extLst xmlns:a="http://schemas.openxmlformats.org/drawingml/2006/main">
               <a:ext uri="{FF2B5EF4-FFF2-40B4-BE49-F238E27FC236}">
-                <a16:creationId xmlns:a16="http://schemas.microsoft.com/office/drawing/2014/main" id="{B85516FD-BFC6-4D87-AF4C-5C0487650C57}"/>
+                <a16:creationId xmlns:a16="http://schemas.microsoft.com/office/drawing/2014/main" id="{16D43135-68D2-48DA-A4DC-1A94AF44ED4B}"/>
               </a:ext>
             </a:extLst>
           </p:cNvPr>
@@ -4384,7 +4384,7 @@
           <p:cNvPr id="14" name="bullet-copy-3">
             <a:extLst xmlns:a="http://schemas.openxmlformats.org/drawingml/2006/main">
               <a:ext uri="{FF2B5EF4-FFF2-40B4-BE49-F238E27FC236}">
-                <a16:creationId xmlns:a16="http://schemas.microsoft.com/office/drawing/2014/main" id="{54C21517-11B2-43A1-8D59-1511B805AB42}"/>
+                <a16:creationId xmlns:a16="http://schemas.microsoft.com/office/drawing/2014/main" id="{24C46935-3C58-4C73-99A3-B29844F3FFD0}"/>
               </a:ext>
             </a:extLst>
           </p:cNvPr>
@@ -4424,7 +4424,7 @@
                   <a:srgbClr val="16343A"/>
                 </a:solidFill>
               </a:rPr>
-              <a:t>Small thumbnail sketches help ideas appear quickly.</a:t>
+              <a:t>Then annotate each option with function, user benefit and possible production challenge.</a:t>
             </a:r>
           </a:p>
         </p:txBody>
@@ -4432,7 +4432,7 @@
     </p:spTree>
     <p:extLst>
       <p:ext uri="{BB962C8B-B14F-4D97-AF65-F5344CB8AC3E}">
-        <p14:creationId xmlns:p14="http://schemas.microsoft.com/office/powerpoint/2010/main" val="986076923"/>
+        <p14:creationId xmlns:p14="http://schemas.microsoft.com/office/powerpoint/2010/main" val="1718598228"/>
       </p:ext>
     </p:extLst>
   </p:cSld>
@@ -4463,7 +4463,7 @@
           <p:cNvPr id="12" name="top-rule">
             <a:extLst xmlns:a="http://schemas.openxmlformats.org/drawingml/2006/main">
               <a:ext uri="{FF2B5EF4-FFF2-40B4-BE49-F238E27FC236}">
-                <a16:creationId xmlns:a16="http://schemas.microsoft.com/office/drawing/2014/main" id="{E2603B6B-5FD6-42DB-A02F-1EF578BD14EA}"/>
+                <a16:creationId xmlns:a16="http://schemas.microsoft.com/office/drawing/2014/main" id="{EB77304E-4F80-4C97-85DD-4C0B0B0F62D7}"/>
               </a:ext>
             </a:extLst>
           </p:cNvPr>
@@ -4494,7 +4494,7 @@
           <p:cNvPr id="2" name="course-label">
             <a:extLst xmlns:a="http://schemas.openxmlformats.org/drawingml/2006/main">
               <a:ext uri="{FF2B5EF4-FFF2-40B4-BE49-F238E27FC236}">
-                <a16:creationId xmlns:a16="http://schemas.microsoft.com/office/drawing/2014/main" id="{4248480A-CAE0-4344-B589-75655A0A8F5D}"/>
+                <a16:creationId xmlns:a16="http://schemas.microsoft.com/office/drawing/2014/main" id="{F5FEF346-F879-4183-B99F-57143023A46F}"/>
               </a:ext>
             </a:extLst>
           </p:cNvPr>
@@ -4544,7 +4544,7 @@
           <p:cNvPr id="3" name="module-label">
             <a:extLst xmlns:a="http://schemas.openxmlformats.org/drawingml/2006/main">
               <a:ext uri="{FF2B5EF4-FFF2-40B4-BE49-F238E27FC236}">
-                <a16:creationId xmlns:a16="http://schemas.microsoft.com/office/drawing/2014/main" id="{4D723E9E-D9F0-4BBC-9674-997363E0C97C}"/>
+                <a16:creationId xmlns:a16="http://schemas.microsoft.com/office/drawing/2014/main" id="{3134540D-0158-4732-AFF0-84533FE4DB61}"/>
               </a:ext>
             </a:extLst>
           </p:cNvPr>
@@ -4594,7 +4594,7 @@
           <p:cNvPr id="4" name="slide-title">
             <a:extLst xmlns:a="http://schemas.openxmlformats.org/drawingml/2006/main">
               <a:ext uri="{FF2B5EF4-FFF2-40B4-BE49-F238E27FC236}">
-                <a16:creationId xmlns:a16="http://schemas.microsoft.com/office/drawing/2014/main" id="{B29BDA75-3E73-4036-BAD2-C1A3283D89C4}"/>
+                <a16:creationId xmlns:a16="http://schemas.microsoft.com/office/drawing/2014/main" id="{B85230AA-3F10-4DC9-B7CA-E3C46C2E0179}"/>
               </a:ext>
             </a:extLst>
           </p:cNvPr>
@@ -4644,7 +4644,7 @@
           <p:cNvPr id="5" name="slide-subtitle">
             <a:extLst xmlns:a="http://schemas.openxmlformats.org/drawingml/2006/main">
               <a:ext uri="{FF2B5EF4-FFF2-40B4-BE49-F238E27FC236}">
-                <a16:creationId xmlns:a16="http://schemas.microsoft.com/office/drawing/2014/main" id="{35C0AEEF-0708-4D15-9E16-22E033A3AB21}"/>
+                <a16:creationId xmlns:a16="http://schemas.microsoft.com/office/drawing/2014/main" id="{1AA5B761-4141-443E-B22B-0CE4F67C3EED}"/>
               </a:ext>
             </a:extLst>
           </p:cNvPr>
@@ -4694,7 +4694,7 @@
           <p:cNvPr id="6" name="prompt-accent">
             <a:extLst xmlns:a="http://schemas.openxmlformats.org/drawingml/2006/main">
               <a:ext uri="{FF2B5EF4-FFF2-40B4-BE49-F238E27FC236}">
-                <a16:creationId xmlns:a16="http://schemas.microsoft.com/office/drawing/2014/main" id="{30EEEAD7-79E0-41D1-BABD-5FFDBDE54E18}"/>
+                <a16:creationId xmlns:a16="http://schemas.microsoft.com/office/drawing/2014/main" id="{F75F814C-DCFB-4CF0-BE71-4A5BF3DD1FC1}"/>
               </a:ext>
             </a:extLst>
           </p:cNvPr>
@@ -4725,7 +4725,7 @@
           <p:cNvPr id="7" name="plain-language">
             <a:extLst xmlns:a="http://schemas.openxmlformats.org/drawingml/2006/main">
               <a:ext uri="{FF2B5EF4-FFF2-40B4-BE49-F238E27FC236}">
-                <a16:creationId xmlns:a16="http://schemas.microsoft.com/office/drawing/2014/main" id="{9D3A0BEE-7905-42E7-BD36-C294D718D540}"/>
+                <a16:creationId xmlns:a16="http://schemas.microsoft.com/office/drawing/2014/main" id="{7E77C06B-079E-44B8-94AC-50EF7BB6B334}"/>
               </a:ext>
             </a:extLst>
           </p:cNvPr>
@@ -4775,7 +4775,7 @@
           <p:cNvPr id="8" name="clarify">
             <a:extLst xmlns:a="http://schemas.openxmlformats.org/drawingml/2006/main">
               <a:ext uri="{FF2B5EF4-FFF2-40B4-BE49-F238E27FC236}">
-                <a16:creationId xmlns:a16="http://schemas.microsoft.com/office/drawing/2014/main" id="{27AEB015-82E5-43FB-A20B-F1FD649F3BB2}"/>
+                <a16:creationId xmlns:a16="http://schemas.microsoft.com/office/drawing/2014/main" id="{A0998108-E38B-476F-8002-7B0B39067277}"/>
               </a:ext>
             </a:extLst>
           </p:cNvPr>
@@ -4825,7 +4825,7 @@
           <p:cNvPr id="9" name="starter-label">
             <a:extLst xmlns:a="http://schemas.openxmlformats.org/drawingml/2006/main">
               <a:ext uri="{FF2B5EF4-FFF2-40B4-BE49-F238E27FC236}">
-                <a16:creationId xmlns:a16="http://schemas.microsoft.com/office/drawing/2014/main" id="{B9ECC9A1-F055-4392-A416-651849060DA9}"/>
+                <a16:creationId xmlns:a16="http://schemas.microsoft.com/office/drawing/2014/main" id="{CD404F95-647E-4A93-B770-9FF23669CAE0}"/>
               </a:ext>
             </a:extLst>
           </p:cNvPr>
@@ -4875,7 +4875,7 @@
           <p:cNvPr id="10" name="starter">
             <a:extLst xmlns:a="http://schemas.openxmlformats.org/drawingml/2006/main">
               <a:ext uri="{FF2B5EF4-FFF2-40B4-BE49-F238E27FC236}">
-                <a16:creationId xmlns:a16="http://schemas.microsoft.com/office/drawing/2014/main" id="{67BB975E-4E9C-496C-970C-7AEC10DC6D6F}"/>
+                <a16:creationId xmlns:a16="http://schemas.microsoft.com/office/drawing/2014/main" id="{5933BF7D-8FE8-406B-9398-F29BCB36B0DE}"/>
               </a:ext>
             </a:extLst>
           </p:cNvPr>
@@ -4925,7 +4925,7 @@
           <p:cNvPr id="11" name="action">
             <a:extLst xmlns:a="http://schemas.openxmlformats.org/drawingml/2006/main">
               <a:ext uri="{FF2B5EF4-FFF2-40B4-BE49-F238E27FC236}">
-                <a16:creationId xmlns:a16="http://schemas.microsoft.com/office/drawing/2014/main" id="{35A16F2F-28D2-4D9A-A58C-83DA05BAB5C2}"/>
+                <a16:creationId xmlns:a16="http://schemas.microsoft.com/office/drawing/2014/main" id="{BFF1F323-66B4-4D91-A448-2E27295F89FF}"/>
               </a:ext>
             </a:extLst>
           </p:cNvPr>
@@ -4973,7 +4973,7 @@
     </p:spTree>
     <p:extLst>
       <p:ext uri="{BB962C8B-B14F-4D97-AF65-F5344CB8AC3E}">
-        <p14:creationId xmlns:p14="http://schemas.microsoft.com/office/powerpoint/2010/main" val="1048437158"/>
+        <p14:creationId xmlns:p14="http://schemas.microsoft.com/office/powerpoint/2010/main" val="1439015886"/>
       </p:ext>
     </p:extLst>
   </p:cSld>
@@ -5004,7 +5004,7 @@
           <p:cNvPr id="15" name="top-rule">
             <a:extLst xmlns:a="http://schemas.openxmlformats.org/drawingml/2006/main">
               <a:ext uri="{FF2B5EF4-FFF2-40B4-BE49-F238E27FC236}">
-                <a16:creationId xmlns:a16="http://schemas.microsoft.com/office/drawing/2014/main" id="{77A8CA00-8803-4AF6-AD40-C8F09C2199F2}"/>
+                <a16:creationId xmlns:a16="http://schemas.microsoft.com/office/drawing/2014/main" id="{CA48C482-C910-4825-9021-ECDEE8F7BA47}"/>
               </a:ext>
             </a:extLst>
           </p:cNvPr>
@@ -5035,7 +5035,7 @@
           <p:cNvPr id="2" name="course-label">
             <a:extLst xmlns:a="http://schemas.openxmlformats.org/drawingml/2006/main">
               <a:ext uri="{FF2B5EF4-FFF2-40B4-BE49-F238E27FC236}">
-                <a16:creationId xmlns:a16="http://schemas.microsoft.com/office/drawing/2014/main" id="{F55ADEB8-C16A-4DA3-BD7F-4BEB04346368}"/>
+                <a16:creationId xmlns:a16="http://schemas.microsoft.com/office/drawing/2014/main" id="{E7716CAB-7A58-4CF0-B2B8-3427A9809F31}"/>
               </a:ext>
             </a:extLst>
           </p:cNvPr>
@@ -5085,7 +5085,7 @@
           <p:cNvPr id="3" name="module-label">
             <a:extLst xmlns:a="http://schemas.openxmlformats.org/drawingml/2006/main">
               <a:ext uri="{FF2B5EF4-FFF2-40B4-BE49-F238E27FC236}">
-                <a16:creationId xmlns:a16="http://schemas.microsoft.com/office/drawing/2014/main" id="{A9CE7D58-0D01-4F2E-BBE2-11E8695FFB9F}"/>
+                <a16:creationId xmlns:a16="http://schemas.microsoft.com/office/drawing/2014/main" id="{4A9D51D6-0353-459A-B35C-68834B000605}"/>
               </a:ext>
             </a:extLst>
           </p:cNvPr>
@@ -5135,7 +5135,7 @@
           <p:cNvPr id="4" name="slide-title">
             <a:extLst xmlns:a="http://schemas.openxmlformats.org/drawingml/2006/main">
               <a:ext uri="{FF2B5EF4-FFF2-40B4-BE49-F238E27FC236}">
-                <a16:creationId xmlns:a16="http://schemas.microsoft.com/office/drawing/2014/main" id="{8776B6CE-92A3-455F-BA64-F543219EF9CB}"/>
+                <a16:creationId xmlns:a16="http://schemas.microsoft.com/office/drawing/2014/main" id="{905E81BC-E087-4CAE-BFFA-692422B6C068}"/>
               </a:ext>
             </a:extLst>
           </p:cNvPr>
@@ -5185,7 +5185,7 @@
           <p:cNvPr id="5" name="slide-subtitle">
             <a:extLst xmlns:a="http://schemas.openxmlformats.org/drawingml/2006/main">
               <a:ext uri="{FF2B5EF4-FFF2-40B4-BE49-F238E27FC236}">
-                <a16:creationId xmlns:a16="http://schemas.microsoft.com/office/drawing/2014/main" id="{7B32C781-0908-48D1-89AE-73E73EE6D6E5}"/>
+                <a16:creationId xmlns:a16="http://schemas.microsoft.com/office/drawing/2014/main" id="{6530C62F-F19B-4DC5-8BF0-31F0E7F932AA}"/>
               </a:ext>
             </a:extLst>
           </p:cNvPr>
@@ -5235,7 +5235,7 @@
           <p:cNvPr id="6" name="bullet-1">
             <a:extLst xmlns:a="http://schemas.openxmlformats.org/drawingml/2006/main">
               <a:ext uri="{FF2B5EF4-FFF2-40B4-BE49-F238E27FC236}">
-                <a16:creationId xmlns:a16="http://schemas.microsoft.com/office/drawing/2014/main" id="{40D1AA9F-E3BB-48B3-9847-620F1C519FDB}"/>
+                <a16:creationId xmlns:a16="http://schemas.microsoft.com/office/drawing/2014/main" id="{F80F8A9B-6E60-49D3-BCDD-3FC34B7C9222}"/>
               </a:ext>
             </a:extLst>
           </p:cNvPr>
@@ -5266,7 +5266,7 @@
           <p:cNvPr id="7" name="bullet-number-1">
             <a:extLst xmlns:a="http://schemas.openxmlformats.org/drawingml/2006/main">
               <a:ext uri="{FF2B5EF4-FFF2-40B4-BE49-F238E27FC236}">
-                <a16:creationId xmlns:a16="http://schemas.microsoft.com/office/drawing/2014/main" id="{BF32FFA7-2275-4B91-9F1E-BE4CA46EDFD7}"/>
+                <a16:creationId xmlns:a16="http://schemas.microsoft.com/office/drawing/2014/main" id="{8DC51F8F-E75C-4D00-BEA9-5AE10E56273F}"/>
               </a:ext>
             </a:extLst>
           </p:cNvPr>
@@ -5316,7 +5316,7 @@
           <p:cNvPr id="8" name="bullet-copy-1">
             <a:extLst xmlns:a="http://schemas.openxmlformats.org/drawingml/2006/main">
               <a:ext uri="{FF2B5EF4-FFF2-40B4-BE49-F238E27FC236}">
-                <a16:creationId xmlns:a16="http://schemas.microsoft.com/office/drawing/2014/main" id="{3AA81FD7-B66B-47AA-8AF1-E55F13FFBFC9}"/>
+                <a16:creationId xmlns:a16="http://schemas.microsoft.com/office/drawing/2014/main" id="{7872DB99-9EF0-431D-A943-A446A3200FA6}"/>
               </a:ext>
             </a:extLst>
           </p:cNvPr>
@@ -5366,7 +5366,7 @@
           <p:cNvPr id="9" name="bullet-2">
             <a:extLst xmlns:a="http://schemas.openxmlformats.org/drawingml/2006/main">
               <a:ext uri="{FF2B5EF4-FFF2-40B4-BE49-F238E27FC236}">
-                <a16:creationId xmlns:a16="http://schemas.microsoft.com/office/drawing/2014/main" id="{56C8EDDE-269E-42D0-AA3C-0B4900B90541}"/>
+                <a16:creationId xmlns:a16="http://schemas.microsoft.com/office/drawing/2014/main" id="{57FD3C52-3BBE-46A9-BAD7-6C5A7457EADF}"/>
               </a:ext>
             </a:extLst>
           </p:cNvPr>
@@ -5397,7 +5397,7 @@
           <p:cNvPr id="10" name="bullet-number-2">
             <a:extLst xmlns:a="http://schemas.openxmlformats.org/drawingml/2006/main">
               <a:ext uri="{FF2B5EF4-FFF2-40B4-BE49-F238E27FC236}">
-                <a16:creationId xmlns:a16="http://schemas.microsoft.com/office/drawing/2014/main" id="{D263D83B-B1DB-4DF7-8185-B8FF5DB3419D}"/>
+                <a16:creationId xmlns:a16="http://schemas.microsoft.com/office/drawing/2014/main" id="{E9E91EC6-DB1D-4303-A06C-E1E1E22D58B9}"/>
               </a:ext>
             </a:extLst>
           </p:cNvPr>
@@ -5447,7 +5447,7 @@
           <p:cNvPr id="11" name="bullet-copy-2">
             <a:extLst xmlns:a="http://schemas.openxmlformats.org/drawingml/2006/main">
               <a:ext uri="{FF2B5EF4-FFF2-40B4-BE49-F238E27FC236}">
-                <a16:creationId xmlns:a16="http://schemas.microsoft.com/office/drawing/2014/main" id="{0BDEB75A-96E4-4C42-9428-800CFEABEC04}"/>
+                <a16:creationId xmlns:a16="http://schemas.microsoft.com/office/drawing/2014/main" id="{448F62B2-0CE6-4357-A96A-0B6B73D63099}"/>
               </a:ext>
             </a:extLst>
           </p:cNvPr>
@@ -5487,7 +5487,7 @@
                   <a:srgbClr val="16343A"/>
                 </a:solidFill>
               </a:rPr>
-              <a:t>Show the overall form and label important materials, components, closures, decorative features and construction decisions.</a:t>
+              <a:t>Convergent thinking narrows the options using evidence.</a:t>
             </a:r>
           </a:p>
         </p:txBody>
@@ -5497,7 +5497,7 @@
           <p:cNvPr id="12" name="bullet-3">
             <a:extLst xmlns:a="http://schemas.openxmlformats.org/drawingml/2006/main">
               <a:ext uri="{FF2B5EF4-FFF2-40B4-BE49-F238E27FC236}">
-                <a16:creationId xmlns:a16="http://schemas.microsoft.com/office/drawing/2014/main" id="{16EC1A89-EC23-4FAA-A030-3DAD6F59765B}"/>
+                <a16:creationId xmlns:a16="http://schemas.microsoft.com/office/drawing/2014/main" id="{FE8B8214-BAA3-4510-B667-88D44610EED7}"/>
               </a:ext>
             </a:extLst>
           </p:cNvPr>
@@ -5528,7 +5528,7 @@
           <p:cNvPr id="13" name="bullet-number-3">
             <a:extLst xmlns:a="http://schemas.openxmlformats.org/drawingml/2006/main">
               <a:ext uri="{FF2B5EF4-FFF2-40B4-BE49-F238E27FC236}">
-                <a16:creationId xmlns:a16="http://schemas.microsoft.com/office/drawing/2014/main" id="{19A5A1D1-B047-4500-A876-84A043809EE1}"/>
+                <a16:creationId xmlns:a16="http://schemas.microsoft.com/office/drawing/2014/main" id="{4AEDA848-995B-4F3D-9782-BA0F7E00EAB9}"/>
               </a:ext>
             </a:extLst>
           </p:cNvPr>
@@ -5578,7 +5578,7 @@
           <p:cNvPr id="14" name="bullet-copy-3">
             <a:extLst xmlns:a="http://schemas.openxmlformats.org/drawingml/2006/main">
               <a:ext uri="{FF2B5EF4-FFF2-40B4-BE49-F238E27FC236}">
-                <a16:creationId xmlns:a16="http://schemas.microsoft.com/office/drawing/2014/main" id="{EAAE0495-6CDC-427B-B79F-9E24F10E96A0}"/>
+                <a16:creationId xmlns:a16="http://schemas.microsoft.com/office/drawing/2014/main" id="{456ED643-ED0B-402E-8909-8D99B5FB1E19}"/>
               </a:ext>
             </a:extLst>
           </p:cNvPr>
@@ -5618,7 +5618,7 @@
                   <a:srgbClr val="16343A"/>
                 </a:solidFill>
               </a:rPr>
-              <a:t>Include views or details when one drawing cannot show enough.</a:t>
+              <a:t>A final communication should include the selected view, useful detail views, labels, a colour/material indication and notes that distinguish confirmed decisions from …</a:t>
             </a:r>
           </a:p>
         </p:txBody>
@@ -5626,7 +5626,7 @@
     </p:spTree>
     <p:extLst>
       <p:ext uri="{BB962C8B-B14F-4D97-AF65-F5344CB8AC3E}">
-        <p14:creationId xmlns:p14="http://schemas.microsoft.com/office/powerpoint/2010/main" val="1086561416"/>
+        <p14:creationId xmlns:p14="http://schemas.microsoft.com/office/powerpoint/2010/main" val="903315468"/>
       </p:ext>
     </p:extLst>
   </p:cSld>
@@ -5657,7 +5657,7 @@
           <p:cNvPr id="6" name="closing-rule">
             <a:extLst xmlns:a="http://schemas.openxmlformats.org/drawingml/2006/main">
               <a:ext uri="{FF2B5EF4-FFF2-40B4-BE49-F238E27FC236}">
-                <a16:creationId xmlns:a16="http://schemas.microsoft.com/office/drawing/2014/main" id="{C0C6BAFF-FE6B-4AB8-9006-756ED2A9B110}"/>
+                <a16:creationId xmlns:a16="http://schemas.microsoft.com/office/drawing/2014/main" id="{B65F3DDC-C2DD-4AED-BEA7-1C0D8AFE7CFC}"/>
               </a:ext>
             </a:extLst>
           </p:cNvPr>
@@ -5688,7 +5688,7 @@
           <p:cNvPr id="2" name="closing-kicker">
             <a:extLst xmlns:a="http://schemas.openxmlformats.org/drawingml/2006/main">
               <a:ext uri="{FF2B5EF4-FFF2-40B4-BE49-F238E27FC236}">
-                <a16:creationId xmlns:a16="http://schemas.microsoft.com/office/drawing/2014/main" id="{F411A540-A624-468F-B48B-22F75838AD32}"/>
+                <a16:creationId xmlns:a16="http://schemas.microsoft.com/office/drawing/2014/main" id="{DB0E8258-DEA4-42EA-A405-86DF5BB657ED}"/>
               </a:ext>
             </a:extLst>
           </p:cNvPr>
@@ -5738,7 +5738,7 @@
           <p:cNvPr id="3" name="closing-title">
             <a:extLst xmlns:a="http://schemas.openxmlformats.org/drawingml/2006/main">
               <a:ext uri="{FF2B5EF4-FFF2-40B4-BE49-F238E27FC236}">
-                <a16:creationId xmlns:a16="http://schemas.microsoft.com/office/drawing/2014/main" id="{1BF1087E-5BA6-4D80-BB33-3B907FBB2A3D}"/>
+                <a16:creationId xmlns:a16="http://schemas.microsoft.com/office/drawing/2014/main" id="{29B5E2E7-F18E-4515-9134-71DA684EFF34}"/>
               </a:ext>
             </a:extLst>
           </p:cNvPr>
@@ -5788,7 +5788,7 @@
           <p:cNvPr id="4" name="closing-copy">
             <a:extLst xmlns:a="http://schemas.openxmlformats.org/drawingml/2006/main">
               <a:ext uri="{FF2B5EF4-FFF2-40B4-BE49-F238E27FC236}">
-                <a16:creationId xmlns:a16="http://schemas.microsoft.com/office/drawing/2014/main" id="{D9494E21-D938-4929-99A7-CBBA200E6411}"/>
+                <a16:creationId xmlns:a16="http://schemas.microsoft.com/office/drawing/2014/main" id="{0CDE052E-2432-4E03-93E5-A750F1AB81AB}"/>
               </a:ext>
             </a:extLst>
           </p:cNvPr>
@@ -5862,7 +5862,7 @@
                   <a:srgbClr val="E6F2EF"/>
                 </a:solidFill>
               </a:rPr>
-              <a:t>3. Continue Project Activity 5 and keep authentic evidence.</a:t>
+              <a:t>3. Continue the Four-concept design studio and keep authentic evidence.</a:t>
             </a:r>
           </a:p>
         </p:txBody>
@@ -5872,7 +5872,7 @@
           <p:cNvPr id="5" name="closing-boundary">
             <a:extLst xmlns:a="http://schemas.openxmlformats.org/drawingml/2006/main">
               <a:ext uri="{FF2B5EF4-FFF2-40B4-BE49-F238E27FC236}">
-                <a16:creationId xmlns:a16="http://schemas.microsoft.com/office/drawing/2014/main" id="{0CE15D12-BE0B-4C57-B070-1DCB9DA2CA36}"/>
+                <a16:creationId xmlns:a16="http://schemas.microsoft.com/office/drawing/2014/main" id="{930BE855-FFE9-4A25-A026-CDA8D88C2B04}"/>
               </a:ext>
             </a:extLst>
           </p:cNvPr>
@@ -5920,7 +5920,7 @@
     </p:spTree>
     <p:extLst>
       <p:ext uri="{BB962C8B-B14F-4D97-AF65-F5344CB8AC3E}">
-        <p14:creationId xmlns:p14="http://schemas.microsoft.com/office/powerpoint/2010/main" val="1591598656"/>
+        <p14:creationId xmlns:p14="http://schemas.microsoft.com/office/powerpoint/2010/main" val="2041007154"/>
       </p:ext>
     </p:extLst>
   </p:cSld>
